--- a/T2 - Práctica React - 29012026/T2 - Presentación práctica.pptx
+++ b/T2 - Práctica React - 29012026/T2 - Presentación práctica.pptx
@@ -108,6 +108,11 @@
       </a:defRPr>
     </a:lvl9pPr>
   </p:defaultTextStyle>
+  <p:extLst>
+    <p:ext uri="{EFAFB233-063F-42B5-8137-9DF3F51BA10A}">
+      <p15:sldGuideLst xmlns:p15="http://schemas.microsoft.com/office/powerpoint/2012/main"/>
+    </p:ext>
+  </p:extLst>
 </p:presentation>
 </file>
 
@@ -258,7 +263,7 @@
           <a:p>
             <a:fld id="{D27EAD16-501C-4E53-89DF-A09081A3B10F}" type="datetimeFigureOut">
               <a:rPr lang="es-ES" smtClean="0"/>
-              <a:t>23/01/2025</a:t>
+              <a:t>13/01/2026</a:t>
             </a:fld>
             <a:endParaRPr lang="es-ES"/>
           </a:p>
@@ -456,7 +461,7 @@
           <a:p>
             <a:fld id="{D27EAD16-501C-4E53-89DF-A09081A3B10F}" type="datetimeFigureOut">
               <a:rPr lang="es-ES" smtClean="0"/>
-              <a:t>23/01/2025</a:t>
+              <a:t>13/01/2026</a:t>
             </a:fld>
             <a:endParaRPr lang="es-ES"/>
           </a:p>
@@ -664,7 +669,7 @@
           <a:p>
             <a:fld id="{D27EAD16-501C-4E53-89DF-A09081A3B10F}" type="datetimeFigureOut">
               <a:rPr lang="es-ES" smtClean="0"/>
-              <a:t>23/01/2025</a:t>
+              <a:t>13/01/2026</a:t>
             </a:fld>
             <a:endParaRPr lang="es-ES"/>
           </a:p>
@@ -862,7 +867,7 @@
           <a:p>
             <a:fld id="{D27EAD16-501C-4E53-89DF-A09081A3B10F}" type="datetimeFigureOut">
               <a:rPr lang="es-ES" smtClean="0"/>
-              <a:t>23/01/2025</a:t>
+              <a:t>13/01/2026</a:t>
             </a:fld>
             <a:endParaRPr lang="es-ES"/>
           </a:p>
@@ -1137,7 +1142,7 @@
           <a:p>
             <a:fld id="{D27EAD16-501C-4E53-89DF-A09081A3B10F}" type="datetimeFigureOut">
               <a:rPr lang="es-ES" smtClean="0"/>
-              <a:t>23/01/2025</a:t>
+              <a:t>13/01/2026</a:t>
             </a:fld>
             <a:endParaRPr lang="es-ES"/>
           </a:p>
@@ -1402,7 +1407,7 @@
           <a:p>
             <a:fld id="{D27EAD16-501C-4E53-89DF-A09081A3B10F}" type="datetimeFigureOut">
               <a:rPr lang="es-ES" smtClean="0"/>
-              <a:t>23/01/2025</a:t>
+              <a:t>13/01/2026</a:t>
             </a:fld>
             <a:endParaRPr lang="es-ES"/>
           </a:p>
@@ -1814,7 +1819,7 @@
           <a:p>
             <a:fld id="{D27EAD16-501C-4E53-89DF-A09081A3B10F}" type="datetimeFigureOut">
               <a:rPr lang="es-ES" smtClean="0"/>
-              <a:t>23/01/2025</a:t>
+              <a:t>13/01/2026</a:t>
             </a:fld>
             <a:endParaRPr lang="es-ES"/>
           </a:p>
@@ -1955,7 +1960,7 @@
           <a:p>
             <a:fld id="{D27EAD16-501C-4E53-89DF-A09081A3B10F}" type="datetimeFigureOut">
               <a:rPr lang="es-ES" smtClean="0"/>
-              <a:t>23/01/2025</a:t>
+              <a:t>13/01/2026</a:t>
             </a:fld>
             <a:endParaRPr lang="es-ES"/>
           </a:p>
@@ -2068,7 +2073,7 @@
           <a:p>
             <a:fld id="{D27EAD16-501C-4E53-89DF-A09081A3B10F}" type="datetimeFigureOut">
               <a:rPr lang="es-ES" smtClean="0"/>
-              <a:t>23/01/2025</a:t>
+              <a:t>13/01/2026</a:t>
             </a:fld>
             <a:endParaRPr lang="es-ES"/>
           </a:p>
@@ -2379,7 +2384,7 @@
           <a:p>
             <a:fld id="{D27EAD16-501C-4E53-89DF-A09081A3B10F}" type="datetimeFigureOut">
               <a:rPr lang="es-ES" smtClean="0"/>
-              <a:t>23/01/2025</a:t>
+              <a:t>13/01/2026</a:t>
             </a:fld>
             <a:endParaRPr lang="es-ES"/>
           </a:p>
@@ -2667,7 +2672,7 @@
           <a:p>
             <a:fld id="{D27EAD16-501C-4E53-89DF-A09081A3B10F}" type="datetimeFigureOut">
               <a:rPr lang="es-ES" smtClean="0"/>
-              <a:t>23/01/2025</a:t>
+              <a:t>13/01/2026</a:t>
             </a:fld>
             <a:endParaRPr lang="es-ES"/>
           </a:p>
@@ -2908,7 +2913,7 @@
           <a:p>
             <a:fld id="{D27EAD16-501C-4E53-89DF-A09081A3B10F}" type="datetimeFigureOut">
               <a:rPr lang="es-ES" smtClean="0"/>
-              <a:t>23/01/2025</a:t>
+              <a:t>13/01/2026</a:t>
             </a:fld>
             <a:endParaRPr lang="es-ES"/>
           </a:p>
@@ -3348,8 +3353,13 @@
           <a:p>
             <a:r>
               <a:rPr lang="es-ES" dirty="0"/>
-              <a:t>Nombre práctica</a:t>
-            </a:r>
+              <a:t>Proyecto </a:t>
+            </a:r>
+            <a:r>
+              <a:rPr lang="es-ES" dirty="0" err="1"/>
+              <a:t>Elearning</a:t>
+            </a:r>
+            <a:endParaRPr lang="es-ES" dirty="0"/>
           </a:p>
         </p:txBody>
       </p:sp>
@@ -3376,7 +3386,7 @@
           <a:p>
             <a:r>
               <a:rPr lang="es-ES" dirty="0"/>
-              <a:t>Nombre alumno/a</a:t>
+              <a:t>Antonio Luis Vela García</a:t>
             </a:r>
           </a:p>
         </p:txBody>
@@ -3543,6 +3553,36 @@
           </a:p>
         </p:txBody>
       </p:sp>
+      <p:pic>
+        <p:nvPicPr>
+          <p:cNvPr id="5" name="Imagen 4">
+            <a:extLst>
+              <a:ext uri="{FF2B5EF4-FFF2-40B4-BE49-F238E27FC236}">
+                <a16:creationId xmlns:a16="http://schemas.microsoft.com/office/drawing/2014/main" id="{1B16613C-A6D6-6FC9-AB5B-74AF0268D111}"/>
+              </a:ext>
+            </a:extLst>
+          </p:cNvPr>
+          <p:cNvPicPr>
+            <a:picLocks noChangeAspect="1"/>
+          </p:cNvPicPr>
+          <p:nvPr/>
+        </p:nvPicPr>
+        <p:blipFill>
+          <a:blip r:embed="rId2"/>
+          <a:stretch>
+            <a:fillRect/>
+          </a:stretch>
+        </p:blipFill>
+        <p:spPr>
+          <a:xfrm>
+            <a:off x="1978702" y="2498072"/>
+            <a:ext cx="6633147" cy="3640400"/>
+          </a:xfrm>
+          <a:prstGeom prst="rect">
+            <a:avLst/>
+          </a:prstGeom>
+        </p:spPr>
+      </p:pic>
     </p:spTree>
     <p:extLst>
       <p:ext uri="{BB962C8B-B14F-4D97-AF65-F5344CB8AC3E}">

--- a/T2 - Práctica React - 29012026/T2 - Presentación práctica.pptx
+++ b/T2 - Práctica React - 29012026/T2 - Presentación práctica.pptx
@@ -263,7 +263,7 @@
           <a:p>
             <a:fld id="{D27EAD16-501C-4E53-89DF-A09081A3B10F}" type="datetimeFigureOut">
               <a:rPr lang="es-ES" smtClean="0"/>
-              <a:t>13/01/2026</a:t>
+              <a:t>31/01/2026</a:t>
             </a:fld>
             <a:endParaRPr lang="es-ES"/>
           </a:p>
@@ -461,7 +461,7 @@
           <a:p>
             <a:fld id="{D27EAD16-501C-4E53-89DF-A09081A3B10F}" type="datetimeFigureOut">
               <a:rPr lang="es-ES" smtClean="0"/>
-              <a:t>13/01/2026</a:t>
+              <a:t>31/01/2026</a:t>
             </a:fld>
             <a:endParaRPr lang="es-ES"/>
           </a:p>
@@ -669,7 +669,7 @@
           <a:p>
             <a:fld id="{D27EAD16-501C-4E53-89DF-A09081A3B10F}" type="datetimeFigureOut">
               <a:rPr lang="es-ES" smtClean="0"/>
-              <a:t>13/01/2026</a:t>
+              <a:t>31/01/2026</a:t>
             </a:fld>
             <a:endParaRPr lang="es-ES"/>
           </a:p>
@@ -867,7 +867,7 @@
           <a:p>
             <a:fld id="{D27EAD16-501C-4E53-89DF-A09081A3B10F}" type="datetimeFigureOut">
               <a:rPr lang="es-ES" smtClean="0"/>
-              <a:t>13/01/2026</a:t>
+              <a:t>31/01/2026</a:t>
             </a:fld>
             <a:endParaRPr lang="es-ES"/>
           </a:p>
@@ -1142,7 +1142,7 @@
           <a:p>
             <a:fld id="{D27EAD16-501C-4E53-89DF-A09081A3B10F}" type="datetimeFigureOut">
               <a:rPr lang="es-ES" smtClean="0"/>
-              <a:t>13/01/2026</a:t>
+              <a:t>31/01/2026</a:t>
             </a:fld>
             <a:endParaRPr lang="es-ES"/>
           </a:p>
@@ -1407,7 +1407,7 @@
           <a:p>
             <a:fld id="{D27EAD16-501C-4E53-89DF-A09081A3B10F}" type="datetimeFigureOut">
               <a:rPr lang="es-ES" smtClean="0"/>
-              <a:t>13/01/2026</a:t>
+              <a:t>31/01/2026</a:t>
             </a:fld>
             <a:endParaRPr lang="es-ES"/>
           </a:p>
@@ -1819,7 +1819,7 @@
           <a:p>
             <a:fld id="{D27EAD16-501C-4E53-89DF-A09081A3B10F}" type="datetimeFigureOut">
               <a:rPr lang="es-ES" smtClean="0"/>
-              <a:t>13/01/2026</a:t>
+              <a:t>31/01/2026</a:t>
             </a:fld>
             <a:endParaRPr lang="es-ES"/>
           </a:p>
@@ -1960,7 +1960,7 @@
           <a:p>
             <a:fld id="{D27EAD16-501C-4E53-89DF-A09081A3B10F}" type="datetimeFigureOut">
               <a:rPr lang="es-ES" smtClean="0"/>
-              <a:t>13/01/2026</a:t>
+              <a:t>31/01/2026</a:t>
             </a:fld>
             <a:endParaRPr lang="es-ES"/>
           </a:p>
@@ -2073,7 +2073,7 @@
           <a:p>
             <a:fld id="{D27EAD16-501C-4E53-89DF-A09081A3B10F}" type="datetimeFigureOut">
               <a:rPr lang="es-ES" smtClean="0"/>
-              <a:t>13/01/2026</a:t>
+              <a:t>31/01/2026</a:t>
             </a:fld>
             <a:endParaRPr lang="es-ES"/>
           </a:p>
@@ -2384,7 +2384,7 @@
           <a:p>
             <a:fld id="{D27EAD16-501C-4E53-89DF-A09081A3B10F}" type="datetimeFigureOut">
               <a:rPr lang="es-ES" smtClean="0"/>
-              <a:t>13/01/2026</a:t>
+              <a:t>31/01/2026</a:t>
             </a:fld>
             <a:endParaRPr lang="es-ES"/>
           </a:p>
@@ -2672,7 +2672,7 @@
           <a:p>
             <a:fld id="{D27EAD16-501C-4E53-89DF-A09081A3B10F}" type="datetimeFigureOut">
               <a:rPr lang="es-ES" smtClean="0"/>
-              <a:t>13/01/2026</a:t>
+              <a:t>31/01/2026</a:t>
             </a:fld>
             <a:endParaRPr lang="es-ES"/>
           </a:p>
@@ -2913,7 +2913,7 @@
           <a:p>
             <a:fld id="{D27EAD16-501C-4E53-89DF-A09081A3B10F}" type="datetimeFigureOut">
               <a:rPr lang="es-ES" smtClean="0"/>
-              <a:t>13/01/2026</a:t>
+              <a:t>31/01/2026</a:t>
             </a:fld>
             <a:endParaRPr lang="es-ES"/>
           </a:p>
@@ -3439,13 +3439,338 @@
         </p:nvSpPr>
         <p:spPr/>
         <p:txBody>
-          <a:bodyPr/>
-          <a:lstStyle/>
-          <a:p>
-            <a:r>
-              <a:rPr lang="es-ES" dirty="0"/>
+          <a:bodyPr>
+            <a:normAutofit/>
+          </a:bodyPr>
+          <a:lstStyle/>
+          <a:p>
+            <a:pPr lvl="0" eaLnBrk="0" fontAlgn="base" hangingPunct="0">
+              <a:lnSpc>
+                <a:spcPct val="100000"/>
+              </a:lnSpc>
+              <a:spcAft>
+                <a:spcPct val="0"/>
+              </a:spcAft>
+            </a:pPr>
+            <a:r>
+              <a:rPr lang="es-ES" sz="4000" dirty="0"/>
               <a:t>Descripción de la práctica</a:t>
             </a:r>
+          </a:p>
+        </p:txBody>
+      </p:sp>
+      <p:sp>
+        <p:nvSpPr>
+          <p:cNvPr id="10" name="CuadroTexto 9">
+            <a:extLst>
+              <a:ext uri="{FF2B5EF4-FFF2-40B4-BE49-F238E27FC236}">
+                <a16:creationId xmlns:a16="http://schemas.microsoft.com/office/drawing/2014/main" id="{C485FA01-E94B-B99E-FC25-19022FD6955D}"/>
+              </a:ext>
+            </a:extLst>
+          </p:cNvPr>
+          <p:cNvSpPr txBox="1"/>
+          <p:nvPr/>
+        </p:nvSpPr>
+        <p:spPr>
+          <a:xfrm>
+            <a:off x="3048886" y="1545403"/>
+            <a:ext cx="6097772" cy="4524315"/>
+          </a:xfrm>
+          <a:prstGeom prst="rect">
+            <a:avLst/>
+          </a:prstGeom>
+          <a:noFill/>
+        </p:spPr>
+        <p:txBody>
+          <a:bodyPr wrap="square">
+            <a:spAutoFit/>
+          </a:bodyPr>
+          <a:lstStyle/>
+          <a:p>
+            <a:r>
+              <a:rPr lang="es-ES" altLang="es-ES" sz="1800" b="1" dirty="0">
+                <a:latin typeface="Arial" panose="020B0604020202020204" pitchFamily="34" charset="0"/>
+              </a:rPr>
+              <a:t>Objetivo Principal:</a:t>
+            </a:r>
+            <a:r>
+              <a:rPr lang="es-ES" altLang="es-ES" sz="1800" dirty="0">
+                <a:latin typeface="Arial" panose="020B0604020202020204" pitchFamily="34" charset="0"/>
+              </a:rPr>
+              <a:t> Desarrollo de una aplicación web </a:t>
+            </a:r>
+            <a:r>
+              <a:rPr lang="es-ES" altLang="es-ES" sz="1800" b="1" dirty="0">
+                <a:latin typeface="Arial" panose="020B0604020202020204" pitchFamily="34" charset="0"/>
+              </a:rPr>
+              <a:t>Full </a:t>
+            </a:r>
+            <a:r>
+              <a:rPr lang="es-ES" altLang="es-ES" sz="1800" b="1" dirty="0" err="1">
+                <a:latin typeface="Arial" panose="020B0604020202020204" pitchFamily="34" charset="0"/>
+              </a:rPr>
+              <a:t>Stack</a:t>
+            </a:r>
+            <a:r>
+              <a:rPr lang="es-ES" altLang="es-ES" sz="1800" dirty="0">
+                <a:latin typeface="Arial" panose="020B0604020202020204" pitchFamily="34" charset="0"/>
+              </a:rPr>
+              <a:t> para la gestión centralizada de recursos educativos, permitiendo administrar un catálogo de </a:t>
+            </a:r>
+            <a:r>
+              <a:rPr lang="es-ES" altLang="es-ES" sz="1800" b="1" dirty="0">
+                <a:latin typeface="Arial" panose="020B0604020202020204" pitchFamily="34" charset="0"/>
+              </a:rPr>
+              <a:t>Cursos</a:t>
+            </a:r>
+            <a:r>
+              <a:rPr lang="es-ES" altLang="es-ES" sz="1800" dirty="0">
+                <a:latin typeface="Arial" panose="020B0604020202020204" pitchFamily="34" charset="0"/>
+              </a:rPr>
+              <a:t> y </a:t>
+            </a:r>
+            <a:r>
+              <a:rPr lang="es-ES" altLang="es-ES" sz="1800" b="1" dirty="0">
+                <a:latin typeface="Arial" panose="020B0604020202020204" pitchFamily="34" charset="0"/>
+              </a:rPr>
+              <a:t>Plataformas</a:t>
+            </a:r>
+            <a:r>
+              <a:rPr lang="es-ES" altLang="es-ES" sz="1800" dirty="0">
+                <a:latin typeface="Arial" panose="020B0604020202020204" pitchFamily="34" charset="0"/>
+              </a:rPr>
+              <a:t> de formación.</a:t>
+            </a:r>
+            <a:br>
+              <a:rPr lang="es-ES" altLang="es-ES" sz="1800" dirty="0">
+                <a:latin typeface="Arial" panose="020B0604020202020204" pitchFamily="34" charset="0"/>
+              </a:rPr>
+            </a:br>
+            <a:r>
+              <a:rPr lang="es-ES" altLang="es-ES" sz="1800" b="1" dirty="0">
+                <a:latin typeface="Arial" panose="020B0604020202020204" pitchFamily="34" charset="0"/>
+              </a:rPr>
+              <a:t>Arquitectura del Sistema:</a:t>
+            </a:r>
+          </a:p>
+          <a:p>
+            <a:r>
+              <a:rPr lang="es-ES" altLang="es-ES" sz="1800" b="1" dirty="0" err="1">
+                <a:latin typeface="Arial" panose="020B0604020202020204" pitchFamily="34" charset="0"/>
+              </a:rPr>
+              <a:t>Frontend</a:t>
+            </a:r>
+            <a:r>
+              <a:rPr lang="es-ES" altLang="es-ES" sz="1800" b="1" dirty="0">
+                <a:latin typeface="Arial" panose="020B0604020202020204" pitchFamily="34" charset="0"/>
+              </a:rPr>
+              <a:t>:</a:t>
+            </a:r>
+            <a:r>
+              <a:rPr lang="es-ES" altLang="es-ES" sz="1800" dirty="0">
+                <a:latin typeface="Arial" panose="020B0604020202020204" pitchFamily="34" charset="0"/>
+              </a:rPr>
+              <a:t> Single Page </a:t>
+            </a:r>
+            <a:r>
+              <a:rPr lang="es-ES" altLang="es-ES" sz="1800" dirty="0" err="1">
+                <a:latin typeface="Arial" panose="020B0604020202020204" pitchFamily="34" charset="0"/>
+              </a:rPr>
+              <a:t>Application</a:t>
+            </a:r>
+            <a:r>
+              <a:rPr lang="es-ES" altLang="es-ES" sz="1800" dirty="0">
+                <a:latin typeface="Arial" panose="020B0604020202020204" pitchFamily="34" charset="0"/>
+              </a:rPr>
+              <a:t> (SPA) reactiva construida con </a:t>
+            </a:r>
+            <a:r>
+              <a:rPr lang="es-ES" altLang="es-ES" sz="1800" b="1" dirty="0" err="1">
+                <a:latin typeface="Arial" panose="020B0604020202020204" pitchFamily="34" charset="0"/>
+              </a:rPr>
+              <a:t>React</a:t>
+            </a:r>
+            <a:r>
+              <a:rPr lang="es-ES" altLang="es-ES" sz="1800" dirty="0">
+                <a:latin typeface="Arial" panose="020B0604020202020204" pitchFamily="34" charset="0"/>
+              </a:rPr>
+              <a:t> y </a:t>
+            </a:r>
+            <a:r>
+              <a:rPr lang="es-ES" altLang="es-ES" sz="1800" b="1" dirty="0">
+                <a:latin typeface="Arial" panose="020B0604020202020204" pitchFamily="34" charset="0"/>
+              </a:rPr>
+              <a:t>Material UI</a:t>
+            </a:r>
+            <a:r>
+              <a:rPr lang="es-ES" altLang="es-ES" dirty="0">
+                <a:latin typeface="Arial" panose="020B0604020202020204" pitchFamily="34" charset="0"/>
+              </a:rPr>
+              <a:t>.</a:t>
+            </a:r>
+            <a:br>
+              <a:rPr lang="es-ES" altLang="es-ES" dirty="0">
+                <a:latin typeface="Arial" panose="020B0604020202020204" pitchFamily="34" charset="0"/>
+              </a:rPr>
+            </a:br>
+            <a:r>
+              <a:rPr lang="es-ES" altLang="es-ES" sz="1800" b="1" dirty="0" err="1">
+                <a:latin typeface="Arial" panose="020B0604020202020204" pitchFamily="34" charset="0"/>
+              </a:rPr>
+              <a:t>Backend</a:t>
+            </a:r>
+            <a:r>
+              <a:rPr lang="es-ES" altLang="es-ES" sz="1800" b="1" dirty="0">
+                <a:latin typeface="Arial" panose="020B0604020202020204" pitchFamily="34" charset="0"/>
+              </a:rPr>
+              <a:t>:</a:t>
+            </a:r>
+            <a:r>
+              <a:rPr lang="es-ES" altLang="es-ES" sz="1800" dirty="0">
+                <a:latin typeface="Arial" panose="020B0604020202020204" pitchFamily="34" charset="0"/>
+              </a:rPr>
+              <a:t> API </a:t>
+            </a:r>
+            <a:r>
+              <a:rPr lang="es-ES" altLang="es-ES" sz="1800" dirty="0" err="1">
+                <a:latin typeface="Arial" panose="020B0604020202020204" pitchFamily="34" charset="0"/>
+              </a:rPr>
+              <a:t>RESTful</a:t>
+            </a:r>
+            <a:r>
+              <a:rPr lang="es-ES" altLang="es-ES" sz="1800" dirty="0">
+                <a:latin typeface="Arial" panose="020B0604020202020204" pitchFamily="34" charset="0"/>
+              </a:rPr>
+              <a:t> desarrollada con </a:t>
+            </a:r>
+            <a:r>
+              <a:rPr lang="es-ES" altLang="es-ES" sz="1800" b="1" dirty="0">
+                <a:latin typeface="Arial" panose="020B0604020202020204" pitchFamily="34" charset="0"/>
+              </a:rPr>
+              <a:t>Node.js</a:t>
+            </a:r>
+            <a:r>
+              <a:rPr lang="es-ES" altLang="es-ES" sz="1800" dirty="0">
+                <a:latin typeface="Arial" panose="020B0604020202020204" pitchFamily="34" charset="0"/>
+              </a:rPr>
+              <a:t>, </a:t>
+            </a:r>
+            <a:r>
+              <a:rPr lang="es-ES" altLang="es-ES" sz="1800" b="1" dirty="0">
+                <a:latin typeface="Arial" panose="020B0604020202020204" pitchFamily="34" charset="0"/>
+              </a:rPr>
+              <a:t>Express</a:t>
+            </a:r>
+            <a:r>
+              <a:rPr lang="es-ES" altLang="es-ES" sz="1800" dirty="0">
+                <a:latin typeface="Arial" panose="020B0604020202020204" pitchFamily="34" charset="0"/>
+              </a:rPr>
+              <a:t> y </a:t>
+            </a:r>
+            <a:r>
+              <a:rPr lang="es-ES" altLang="es-ES" sz="1800" b="1" dirty="0" err="1">
+                <a:latin typeface="Arial" panose="020B0604020202020204" pitchFamily="34" charset="0"/>
+              </a:rPr>
+              <a:t>Sequelize</a:t>
+            </a:r>
+            <a:r>
+              <a:rPr lang="es-ES" altLang="es-ES" sz="1800" dirty="0">
+                <a:latin typeface="Arial" panose="020B0604020202020204" pitchFamily="34" charset="0"/>
+              </a:rPr>
+              <a:t> (MySQL).</a:t>
+            </a:r>
+            <a:br>
+              <a:rPr lang="es-ES" altLang="es-ES" sz="1800" dirty="0">
+                <a:latin typeface="Arial" panose="020B0604020202020204" pitchFamily="34" charset="0"/>
+              </a:rPr>
+            </a:br>
+            <a:r>
+              <a:rPr lang="es-ES" altLang="es-ES" sz="1800" b="1" dirty="0">
+                <a:latin typeface="Arial" panose="020B0604020202020204" pitchFamily="34" charset="0"/>
+              </a:rPr>
+              <a:t>Funcionalidades Implementadas:</a:t>
+            </a:r>
+            <a:br>
+              <a:rPr lang="es-ES" altLang="es-ES" sz="1800" dirty="0">
+                <a:latin typeface="Arial" panose="020B0604020202020204" pitchFamily="34" charset="0"/>
+              </a:rPr>
+            </a:br>
+            <a:r>
+              <a:rPr lang="es-ES" altLang="es-ES" sz="1800" dirty="0">
+                <a:latin typeface="Arial" panose="020B0604020202020204" pitchFamily="34" charset="0"/>
+              </a:rPr>
+              <a:t>Gestión completa de datos (CRUD: Crear, Leer, Actualizar, Borrar).</a:t>
+            </a:r>
+            <a:br>
+              <a:rPr lang="es-ES" altLang="es-ES" sz="1800" dirty="0">
+                <a:latin typeface="Arial" panose="020B0604020202020204" pitchFamily="34" charset="0"/>
+              </a:rPr>
+            </a:br>
+            <a:r>
+              <a:rPr lang="es-ES" altLang="es-ES" sz="1800" dirty="0">
+                <a:latin typeface="Arial" panose="020B0604020202020204" pitchFamily="34" charset="0"/>
+              </a:rPr>
+              <a:t>Visualización avanzada mediante </a:t>
+            </a:r>
+            <a:r>
+              <a:rPr lang="es-ES" altLang="es-ES" sz="1800" b="1" dirty="0">
+                <a:latin typeface="Arial" panose="020B0604020202020204" pitchFamily="34" charset="0"/>
+              </a:rPr>
+              <a:t>Tablas Paginadas</a:t>
+            </a:r>
+            <a:r>
+              <a:rPr lang="es-ES" altLang="es-ES" sz="1800" dirty="0">
+                <a:latin typeface="Arial" panose="020B0604020202020204" pitchFamily="34" charset="0"/>
+              </a:rPr>
+              <a:t>, </a:t>
+            </a:r>
+            <a:r>
+              <a:rPr lang="es-ES" altLang="es-ES" sz="1800" b="1" dirty="0">
+                <a:latin typeface="Arial" panose="020B0604020202020204" pitchFamily="34" charset="0"/>
+              </a:rPr>
+              <a:t>Tarjetas (</a:t>
+            </a:r>
+            <a:r>
+              <a:rPr lang="es-ES" altLang="es-ES" sz="1800" b="1" u="sng" dirty="0" err="1">
+                <a:latin typeface="Arial" panose="020B0604020202020204" pitchFamily="34" charset="0"/>
+              </a:rPr>
+              <a:t>Cards</a:t>
+            </a:r>
+            <a:r>
+              <a:rPr lang="es-ES" altLang="es-ES" sz="1800" b="1" dirty="0">
+                <a:latin typeface="Arial" panose="020B0604020202020204" pitchFamily="34" charset="0"/>
+              </a:rPr>
+              <a:t>)</a:t>
+            </a:r>
+            <a:r>
+              <a:rPr lang="es-ES" altLang="es-ES" sz="1800" dirty="0">
+                <a:latin typeface="Arial" panose="020B0604020202020204" pitchFamily="34" charset="0"/>
+              </a:rPr>
+              <a:t> y </a:t>
+            </a:r>
+            <a:r>
+              <a:rPr lang="es-ES" altLang="es-ES" sz="1800" b="1" dirty="0" err="1">
+                <a:latin typeface="Arial" panose="020B0604020202020204" pitchFamily="34" charset="0"/>
+              </a:rPr>
+              <a:t>DataGrid</a:t>
+            </a:r>
+            <a:r>
+              <a:rPr lang="es-ES" altLang="es-ES" sz="1800" dirty="0">
+                <a:latin typeface="Arial" panose="020B0604020202020204" pitchFamily="34" charset="0"/>
+              </a:rPr>
+              <a:t>.</a:t>
+            </a:r>
+            <a:br>
+              <a:rPr lang="es-ES" altLang="es-ES" sz="1800" dirty="0">
+                <a:latin typeface="Arial" panose="020B0604020202020204" pitchFamily="34" charset="0"/>
+              </a:rPr>
+            </a:br>
+            <a:br>
+              <a:rPr lang="es-ES" altLang="es-ES" sz="1800" dirty="0">
+                <a:latin typeface="Arial" panose="020B0604020202020204" pitchFamily="34" charset="0"/>
+              </a:rPr>
+            </a:br>
+            <a:endParaRPr lang="es-ES" dirty="0"/>
           </a:p>
         </p:txBody>
       </p:sp>
@@ -3684,10 +4009,10 @@
       </p:sp>
       <p:pic>
         <p:nvPicPr>
-          <p:cNvPr id="6" name="Imagen 5">
-            <a:extLst>
-              <a:ext uri="{FF2B5EF4-FFF2-40B4-BE49-F238E27FC236}">
-                <a16:creationId xmlns:a16="http://schemas.microsoft.com/office/drawing/2014/main" id="{BC5190BF-31FC-8C1C-EF74-D4B660D72D2F}"/>
+          <p:cNvPr id="5" name="Imagen 4">
+            <a:extLst>
+              <a:ext uri="{FF2B5EF4-FFF2-40B4-BE49-F238E27FC236}">
+                <a16:creationId xmlns:a16="http://schemas.microsoft.com/office/drawing/2014/main" id="{26D68BC7-5E58-8852-3BBD-666149162475}"/>
               </a:ext>
             </a:extLst>
           </p:cNvPr>
@@ -3704,8 +4029,8 @@
         </p:blipFill>
         <p:spPr>
           <a:xfrm>
-            <a:off x="3051810" y="1795010"/>
-            <a:ext cx="6088380" cy="5113020"/>
+            <a:off x="2771258" y="1914002"/>
+            <a:ext cx="6372742" cy="4578873"/>
           </a:xfrm>
           <a:prstGeom prst="rect">
             <a:avLst/>
@@ -3791,7 +4116,7 @@
         <p:spPr>
           <a:xfrm>
             <a:off x="993058" y="1858297"/>
-            <a:ext cx="9537290" cy="369332"/>
+            <a:ext cx="9537290" cy="646331"/>
           </a:xfrm>
           <a:prstGeom prst="rect">
             <a:avLst/>
@@ -3806,7 +4131,17 @@
           <a:p>
             <a:r>
               <a:rPr lang="es-ES" dirty="0"/>
-              <a:t>Insertar enlace a repositorio de GitHub</a:t>
+              <a:t>Insertar enlace a repositorio de GitHub </a:t>
+            </a:r>
+            <a:r>
+              <a:rPr lang="es-ES" dirty="0">
+                <a:hlinkClick r:id="rId2"/>
+              </a:rPr>
+              <a:t>https://github.com/AntonioLuis3181/Proyecto_Elearning_Antonio.git</a:t>
+            </a:r>
+            <a:r>
+              <a:rPr lang="es-ES" dirty="0"/>
+              <a:t> </a:t>
             </a:r>
           </a:p>
         </p:txBody>
